--- a/PPTs/Lecture 6 - IP Addressing Exercises ANS.pptx
+++ b/PPTs/Lecture 6 - IP Addressing Exercises ANS.pptx
@@ -13823,7 +13823,7 @@
         </p:spPr>
         <p:txBody>
           <a:bodyPr spcFirstLastPara="1" wrap="square" lIns="91425" tIns="91425" rIns="91425" bIns="91425" anchor="t" anchorCtr="0">
-            <a:normAutofit fontScale="85000" lnSpcReduction="20000"/>
+            <a:normAutofit fontScale="77500" lnSpcReduction="20000"/>
           </a:bodyPr>
           <a:lstStyle/>
           <a:p>
@@ -13840,7 +13840,7 @@
             </a:r>
             <a:r>
               <a:rPr lang="en-US" dirty="0"/>
-              <a:t> Routing) addressing scheme is used, and that the domain hofstra.edu has the 123.100.0.0/16 prefix reserved.</a:t>
+              <a:t> Routing) addressing scheme is used, and that the domain hofstra.edu has the 123.100.0.0/16 prefix reserved. For each problem, choose the smallest unused prefix to assign next.</a:t>
             </a:r>
           </a:p>
           <a:p>
@@ -15042,7 +15042,7 @@
             </a:r>
             <a:r>
               <a:rPr lang="en-US" dirty="0"/>
-              <a:t> = 64 addresses. Thus, we need a (32 - 6) = /26 prefix. We have to assign a prefix that is currently unclaimed. If Math claimed 123.100.128.0/18, Engr/CS claimed 123.100.192.0/18, and Chemistry claimed 123.100.0.0/18, then only the 123.100.64.0/18 prefix is unclaimed. Hence AI should claim 123.100.64.0/26. In summary:</a:t>
+              <a:t> – 1 = 63 addresses. Thus, we need a (32 - 6) = /26 prefix. We have to assign a prefix that is currently unclaimed. If Math claimed 123.100.128.0/18, Engr/CS claimed 123.100.192.0/18, and Chemistry claimed 123.100.0.0/18, then only the 123.100.64.0/18 prefix is unclaimed. Hence AI should claim 123.100.64.0/26. In summary:</a:t>
             </a:r>
           </a:p>
           <a:p>
